--- a/Onyx_TrustBank_Presentation_8.pptx
+++ b/Onyx_TrustBank_Presentation_8.pptx
@@ -1878,7 +1878,7 @@
       </p:grpSpPr>
       <p:sp>
         <p:nvSpPr>
-          <p:cNvPr id="2" name="Text 0"/>
+          <p:cNvPr id="301" name="Eyebrow"/>
           <p:cNvSpPr/>
           <p:nvPr/>
         </p:nvSpPr>
@@ -1897,7 +1897,7 @@
           <a:bodyPr wrap="square" lIns="0" tIns="0" rIns="0" bIns="0" rtlCol="0" anchor="ctr"/>
           <a:lstStyle/>
           <a:p>
-            <a:pPr marL="0" indent="0">
+            <a:pPr marL="0" indent="0" algn="l">
               <a:buNone/>
             </a:pPr>
             <a:r>
@@ -1917,7 +1917,7 @@
       </p:sp>
       <p:sp>
         <p:nvSpPr>
-          <p:cNvPr id="3" name="Text 1"/>
+          <p:cNvPr id="302" name="Title"/>
           <p:cNvSpPr/>
           <p:nvPr/>
         </p:nvSpPr>
@@ -1936,11 +1936,11 @@
           <a:bodyPr wrap="square" lIns="0" tIns="0" rIns="0" bIns="0" rtlCol="0" anchor="ctr"/>
           <a:lstStyle/>
           <a:p>
-            <a:pPr marL="0" indent="0">
-              <a:buNone/>
-            </a:pPr>
-            <a:r>
-              <a:rPr lang="en-US" sz="3000" b="1" dirty="0">
+            <a:pPr marL="0" indent="0" algn="l">
+              <a:buNone/>
+            </a:pPr>
+            <a:r>
+              <a:rPr lang="en-US" sz="3000" b="1" kern="0" dirty="0">
                 <a:solidFill>
                   <a:srgbClr val="212121"/>
                 </a:solidFill>
@@ -1948,15 +1948,16 @@
                 <a:ea typeface="Cambria" pitchFamily="34" charset="-122"/>
                 <a:cs typeface="Cambria" pitchFamily="34" charset="-120"/>
               </a:rPr>
-              <a:t>A boutique firm with big-firm experience</a:t>
-            </a:r>
-          </a:p>
-          <a:p>
-            <a:pPr marL="0" indent="0">
-              <a:buNone/>
-            </a:pPr>
-            <a:r>
-              <a:rPr lang="en-US" sz="1050" b="1" dirty="0">
+              <a:t>One firm, two continents, big-firm experience</a:t>
+            </a:r>
+            <a:endParaRPr lang="en-US" sz="3000" dirty="0"/>
+          </a:p>
+          <a:p>
+            <a:pPr marL="0" indent="0" algn="l">
+              <a:buNone/>
+            </a:pPr>
+            <a:r>
+              <a:rPr lang="en-US" sz="1050" b="1" kern="0" dirty="0">
                 <a:solidFill>
                   <a:srgbClr val="212121"/>
                 </a:solidFill>
@@ -1972,283 +1973,24 @@
       </p:sp>
       <p:sp>
         <p:nvSpPr>
-          <p:cNvPr id="201" name="Stat Big 0"/>
-          <p:cNvSpPr/>
-          <p:nvPr/>
-        </p:nvSpPr>
-        <p:spPr>
-          <a:xfrm>
-            <a:off x="548640" y="1719072"/>
-            <a:ext cx="5121840" cy="457200"/>
-          </a:xfrm>
-          <a:prstGeom prst="rect">
-            <a:avLst/>
-          </a:prstGeom>
-          <a:noFill/>
-          <a:ln/>
-        </p:spPr>
-        <p:txBody>
-          <a:bodyPr wrap="square" lIns="0" tIns="0" rIns="0" bIns="0" rtlCol="0" anchor="t"/>
-          <a:lstStyle/>
-          <a:p>
-            <a:pPr marL="0" indent="0" algn="l">
-              <a:lnSpc>
-                <a:spcPct val="112000"/>
-              </a:lnSpc>
-              <a:buNone/>
-            </a:pPr>
-            <a:r>
-              <a:rPr lang="en-US" sz="2600" b="1" dirty="0">
-                <a:solidFill>
-                  <a:srgbClr val="B08D57"/>
-                </a:solidFill>
-                <a:latin typeface="Cambria" pitchFamily="18" charset="0"/>
-                <a:ea typeface="Cambria" pitchFamily="18" charset="-122"/>
-                <a:cs typeface="Times New Roman" pitchFamily="18" charset="0"/>
-              </a:rPr>
-              <a:t>TOP 10</a:t>
-            </a:r>
-            <a:endParaRPr lang="en-US" dirty="0"/>
-          </a:p>
-        </p:txBody>
-      </p:sp>
-      <p:sp>
-        <p:nvSpPr>
-          <p:cNvPr id="202" name="Stat Label 0"/>
-          <p:cNvSpPr/>
-          <p:nvPr/>
-        </p:nvSpPr>
-        <p:spPr>
-          <a:xfrm>
-            <a:off x="548640" y="2176272"/>
-            <a:ext cx="5121840" cy="274320"/>
-          </a:xfrm>
-          <a:prstGeom prst="rect">
-            <a:avLst/>
-          </a:prstGeom>
-          <a:noFill/>
-          <a:ln/>
-        </p:spPr>
-        <p:txBody>
-          <a:bodyPr wrap="square" lIns="0" tIns="0" rIns="0" bIns="0" rtlCol="0" anchor="t"/>
-          <a:lstStyle/>
-          <a:p>
-            <a:pPr marL="0" indent="0" algn="l">
-              <a:lnSpc>
-                <a:spcPct val="112000"/>
-              </a:lnSpc>
-              <a:buNone/>
-            </a:pPr>
-            <a:r>
-              <a:rPr lang="en-US" sz="1050" dirty="0">
-                <a:solidFill>
-                  <a:srgbClr val="5F5F5F"/>
-                </a:solidFill>
-                <a:latin typeface="Calibri" pitchFamily="34" charset="0"/>
-                <a:ea typeface="Calibri" pitchFamily="34" charset="-122"/>
-                <a:cs typeface="Calibri" pitchFamily="34" charset="-120"/>
-              </a:rPr>
-              <a:t>former Directors &amp; Managers of Top 10 accounting firms</a:t>
-            </a:r>
-            <a:endParaRPr lang="en-US" dirty="0"/>
-          </a:p>
-        </p:txBody>
-      </p:sp>
-      <p:sp>
-        <p:nvSpPr>
-          <p:cNvPr id="203" name="Stat Big 1"/>
-          <p:cNvSpPr/>
-          <p:nvPr/>
-        </p:nvSpPr>
-        <p:spPr>
-          <a:xfrm>
-            <a:off x="548640" y="3876644"/>
-            <a:ext cx="5121840" cy="457200"/>
-          </a:xfrm>
-          <a:prstGeom prst="rect">
-            <a:avLst/>
-          </a:prstGeom>
-          <a:noFill/>
-          <a:ln/>
-        </p:spPr>
-        <p:txBody>
-          <a:bodyPr wrap="square" lIns="0" tIns="0" rIns="0" bIns="0" rtlCol="0" anchor="t"/>
-          <a:lstStyle/>
-          <a:p>
-            <a:pPr marL="0" indent="0" algn="l">
-              <a:lnSpc>
-                <a:spcPct val="112000"/>
-              </a:lnSpc>
-              <a:buNone/>
-            </a:pPr>
-            <a:r>
-              <a:rPr lang="en-US" sz="2600" b="1" dirty="0">
-                <a:solidFill>
-                  <a:srgbClr val="B08D57"/>
-                </a:solidFill>
-                <a:latin typeface="Cambria" pitchFamily="18" charset="0"/>
-                <a:ea typeface="Cambria" pitchFamily="18" charset="-122"/>
-                <a:cs typeface="Times New Roman" pitchFamily="18" charset="0"/>
-              </a:rPr>
-              <a:t>PRIVATE EQUITY</a:t>
-            </a:r>
-            <a:endParaRPr lang="en-US" dirty="0"/>
-          </a:p>
-        </p:txBody>
-      </p:sp>
-      <p:sp>
-        <p:nvSpPr>
-          <p:cNvPr id="204" name="Stat Label 1"/>
-          <p:cNvSpPr/>
-          <p:nvPr/>
-        </p:nvSpPr>
-        <p:spPr>
-          <a:xfrm>
-            <a:off x="548640" y="4333844"/>
-            <a:ext cx="5121840" cy="274320"/>
-          </a:xfrm>
-          <a:prstGeom prst="rect">
-            <a:avLst/>
-          </a:prstGeom>
-          <a:noFill/>
-          <a:ln/>
-        </p:spPr>
-        <p:txBody>
-          <a:bodyPr wrap="square" lIns="0" tIns="0" rIns="0" bIns="0" rtlCol="0" anchor="t"/>
-          <a:lstStyle/>
-          <a:p>
-            <a:pPr marL="0" indent="0" algn="l">
-              <a:lnSpc>
-                <a:spcPct val="112000"/>
-              </a:lnSpc>
-              <a:buNone/>
-            </a:pPr>
-            <a:r>
-              <a:rPr lang="en-US" sz="1050" dirty="0">
-                <a:solidFill>
-                  <a:srgbClr val="5F5F5F"/>
-                </a:solidFill>
-                <a:latin typeface="Calibri" pitchFamily="34" charset="0"/>
-                <a:ea typeface="Calibri" pitchFamily="34" charset="-122"/>
-                <a:cs typeface="Calibri" pitchFamily="34" charset="-120"/>
-              </a:rPr>
-              <a:t>and private industry operating experience</a:t>
-            </a:r>
-            <a:endParaRPr lang="en-US" dirty="0"/>
-          </a:p>
-        </p:txBody>
-      </p:sp>
-      <p:sp>
-        <p:nvSpPr>
-          <p:cNvPr id="205" name="Stat Big 2"/>
-          <p:cNvSpPr/>
-          <p:nvPr/>
-        </p:nvSpPr>
-        <p:spPr>
-          <a:xfrm>
-            <a:off x="548640" y="2683512"/>
-            <a:ext cx="5121840" cy="457200"/>
-          </a:xfrm>
-          <a:prstGeom prst="rect">
-            <a:avLst/>
-          </a:prstGeom>
-          <a:noFill/>
-          <a:ln/>
-        </p:spPr>
-        <p:txBody>
-          <a:bodyPr wrap="square" lIns="0" tIns="0" rIns="0" bIns="0" rtlCol="0" anchor="t"/>
-          <a:lstStyle/>
-          <a:p>
-            <a:pPr marL="0" indent="0" algn="l">
-              <a:lnSpc>
-                <a:spcPct val="112000"/>
-              </a:lnSpc>
-              <a:buNone/>
-            </a:pPr>
-            <a:r>
-              <a:rPr lang="en-US" sz="2600" b="1" dirty="0">
-                <a:solidFill>
-                  <a:srgbClr val="B08D57"/>
-                </a:solidFill>
-                <a:latin typeface="Cambria" pitchFamily="18" charset="0"/>
-                <a:ea typeface="Cambria" pitchFamily="18" charset="-122"/>
-                <a:cs typeface="Times New Roman" pitchFamily="18" charset="0"/>
-              </a:rPr>
-              <a:t>MULTI-INDUSTRY</a:t>
-            </a:r>
-            <a:endParaRPr lang="en-US" dirty="0"/>
-          </a:p>
-        </p:txBody>
-      </p:sp>
-      <p:sp>
-        <p:nvSpPr>
-          <p:cNvPr id="206" name="Stat Label 2"/>
-          <p:cNvSpPr/>
-          <p:nvPr/>
-        </p:nvSpPr>
-        <p:spPr>
-          <a:xfrm>
-            <a:off x="548640" y="3140712"/>
-            <a:ext cx="5121840" cy="502920"/>
-          </a:xfrm>
-          <a:prstGeom prst="rect">
-            <a:avLst/>
-          </a:prstGeom>
-          <a:noFill/>
-          <a:ln/>
-        </p:spPr>
-        <p:txBody>
-          <a:bodyPr wrap="square" lIns="0" tIns="0" rIns="0" bIns="0" rtlCol="0" anchor="t"/>
-          <a:lstStyle/>
-          <a:p>
-            <a:pPr marL="0" indent="0" algn="l">
-              <a:lnSpc>
-                <a:spcPct val="112000"/>
-              </a:lnSpc>
-              <a:buNone/>
-            </a:pPr>
-            <a:r>
-              <a:rPr lang="en-US" sz="1050" dirty="0">
-                <a:solidFill>
-                  <a:srgbClr val="5F5F5F"/>
-                </a:solidFill>
-                <a:latin typeface="Calibri" pitchFamily="34" charset="0"/>
-                <a:ea typeface="Calibri" pitchFamily="34" charset="-122"/>
-                <a:cs typeface="Calibri" pitchFamily="34" charset="-120"/>
-              </a:rPr>
-              <a:t>construction · real estate · property management · professional services · distribution/retail</a:t>
-            </a:r>
-            <a:endParaRPr lang="en-US" dirty="0"/>
-          </a:p>
-        </p:txBody>
-      </p:sp>
-      <p:sp>
-        <p:nvSpPr>
-          <p:cNvPr id="4" name="Shape 2"/>
-          <p:cNvSpPr/>
-          <p:nvPr/>
-        </p:nvSpPr>
-        <p:spPr>
-          <a:xfrm>
-            <a:off x="6035040" y="1719072"/>
-            <a:ext cx="2712720" cy="1005840"/>
+          <p:cNvPr id="303" name="Team Panel"/>
+          <p:cNvSpPr/>
+          <p:nvPr/>
+        </p:nvSpPr>
+        <p:spPr>
+          <a:xfrm>
+            <a:off x="548640" y="1691640"/>
+            <a:ext cx="11064240" cy="2350008"/>
           </a:xfrm>
           <a:prstGeom prst="roundRect">
             <a:avLst>
-              <a:gd name="adj" fmla="val 2745"/>
+              <a:gd name="adj" fmla="val 4000"/>
             </a:avLst>
           </a:prstGeom>
           <a:solidFill>
             <a:srgbClr val="F5F5F4"/>
           </a:solidFill>
           <a:ln/>
-          <a:effectLst>
-            <a:outerShdw blurRad="88900" dist="25400" dir="5400000" algn="bl" rotWithShape="0">
-              <a:srgbClr val="000000">
-                <a:alpha val="13000"/>
-              </a:srgbClr>
-            </a:outerShdw>
-          </a:effectLst>
         </p:spPr>
         <p:txBody>
           <a:bodyPr/>
@@ -2260,14 +2002,53 @@
       </p:sp>
       <p:sp>
         <p:nvSpPr>
-          <p:cNvPr id="5" name="Shape 3"/>
-          <p:cNvSpPr/>
-          <p:nvPr/>
-        </p:nvSpPr>
-        <p:spPr>
-          <a:xfrm>
-            <a:off x="6172200" y="1901952"/>
-            <a:ext cx="365760" cy="365760"/>
+          <p:cNvPr id="304" name="Leadership Label"/>
+          <p:cNvSpPr/>
+          <p:nvPr/>
+        </p:nvSpPr>
+        <p:spPr>
+          <a:xfrm>
+            <a:off x="841248" y="1920240"/>
+            <a:ext cx="10479024" cy="228600"/>
+          </a:xfrm>
+          <a:prstGeom prst="rect">
+            <a:avLst/>
+          </a:prstGeom>
+          <a:noFill/>
+          <a:ln/>
+        </p:spPr>
+        <p:txBody>
+          <a:bodyPr wrap="square" lIns="0" tIns="0" rIns="0" bIns="0" rtlCol="0" anchor="t"/>
+          <a:lstStyle/>
+          <a:p>
+            <a:pPr marL="0" indent="0" algn="l">
+              <a:buNone/>
+            </a:pPr>
+            <a:r>
+              <a:rPr lang="en-US" sz="950" b="1" kern="0" spc="200" dirty="0">
+                <a:solidFill>
+                  <a:srgbClr val="8F7346"/>
+                </a:solidFill>
+                <a:latin typeface="Calibri" pitchFamily="34" charset="0"/>
+                <a:ea typeface="Calibri" pitchFamily="34" charset="-122"/>
+                <a:cs typeface="Calibri" pitchFamily="34" charset="-120"/>
+              </a:rPr>
+              <a:t>LEADERSHIP</a:t>
+            </a:r>
+            <a:endParaRPr lang="en-US" sz="950" dirty="0"/>
+          </a:p>
+        </p:txBody>
+      </p:sp>
+      <p:sp>
+        <p:nvSpPr>
+          <p:cNvPr id="305" name="Lead Circle"/>
+          <p:cNvSpPr/>
+          <p:nvPr/>
+        </p:nvSpPr>
+        <p:spPr>
+          <a:xfrm>
+            <a:off x="841248" y="2194560"/>
+            <a:ext cx="502920" cy="502920"/>
           </a:xfrm>
           <a:prstGeom prst="ellipse">
             <a:avLst/>
@@ -2287,7 +2068,7 @@
       </p:sp>
       <p:pic>
         <p:nvPicPr>
-          <p:cNvPr id="6" name="Image 0" descr="/sessions/blissful-awesome-feynman/build/icons/usertie.png"/>
+          <p:cNvPr id="306" name="Lead Icon"/>
           <p:cNvPicPr>
             <a:picLocks noChangeAspect="1"/>
           </p:cNvPicPr>
@@ -2301,8 +2082,8 @@
         </p:blipFill>
         <p:spPr>
           <a:xfrm>
-            <a:off x="6267450" y="1997202"/>
-            <a:ext cx="175260" cy="175260"/>
+            <a:off x="982980" y="2336292"/>
+            <a:ext cx="219456" cy="219456"/>
           </a:xfrm>
           <a:prstGeom prst="rect">
             <a:avLst/>
@@ -2311,69 +2092,69 @@
       </p:pic>
       <p:sp>
         <p:nvSpPr>
-          <p:cNvPr id="7" name="Text 4"/>
-          <p:cNvSpPr/>
-          <p:nvPr/>
-        </p:nvSpPr>
-        <p:spPr>
-          <a:xfrm>
-            <a:off x="6675120" y="1865376"/>
-            <a:ext cx="2011680" cy="292608"/>
-          </a:xfrm>
-          <a:prstGeom prst="rect">
-            <a:avLst/>
-          </a:prstGeom>
-          <a:noFill/>
-          <a:ln/>
-        </p:spPr>
-        <p:txBody>
-          <a:bodyPr wrap="square" lIns="0" tIns="0" rIns="0" bIns="0" rtlCol="0" anchor="ctr"/>
-          <a:lstStyle/>
-          <a:p>
-            <a:pPr marL="0" indent="0">
-              <a:buNone/>
-            </a:pPr>
-            <a:r>
-              <a:rPr lang="en-US" sz="1600" b="1" dirty="0">
+          <p:cNvPr id="307" name="Lead Name"/>
+          <p:cNvSpPr/>
+          <p:nvPr/>
+        </p:nvSpPr>
+        <p:spPr>
+          <a:xfrm>
+            <a:off x="1490472" y="2185416"/>
+            <a:ext cx="4361688" cy="274320"/>
+          </a:xfrm>
+          <a:prstGeom prst="rect">
+            <a:avLst/>
+          </a:prstGeom>
+          <a:noFill/>
+          <a:ln/>
+        </p:spPr>
+        <p:txBody>
+          <a:bodyPr wrap="square" lIns="0" tIns="0" rIns="0" bIns="0" rtlCol="0" anchor="t"/>
+          <a:lstStyle/>
+          <a:p>
+            <a:pPr marL="0" indent="0" algn="l">
+              <a:buNone/>
+            </a:pPr>
+            <a:r>
+              <a:rPr lang="en-US" sz="1500" b="1" kern="0" dirty="0">
                 <a:solidFill>
                   <a:srgbClr val="212121"/>
                 </a:solidFill>
-                <a:latin typeface="Calibri" pitchFamily="34" charset="0"/>
-                <a:ea typeface="Calibri" pitchFamily="34" charset="-122"/>
-                <a:cs typeface="Calibri" pitchFamily="34" charset="-120"/>
+                <a:latin typeface="Cambria" pitchFamily="34" charset="0"/>
+                <a:ea typeface="Cambria" pitchFamily="34" charset="-122"/>
+                <a:cs typeface="Cambria" pitchFamily="34" charset="-120"/>
               </a:rPr>
               <a:t>Steven Nikolov</a:t>
             </a:r>
-            <a:endParaRPr lang="en-US" sz="1600" dirty="0"/>
-          </a:p>
-        </p:txBody>
-      </p:sp>
-      <p:sp>
-        <p:nvSpPr>
-          <p:cNvPr id="8" name="Text 5"/>
-          <p:cNvSpPr/>
-          <p:nvPr/>
-        </p:nvSpPr>
-        <p:spPr>
-          <a:xfrm>
-            <a:off x="6675120" y="2139696"/>
-            <a:ext cx="1980000" cy="457200"/>
-          </a:xfrm>
-          <a:prstGeom prst="rect">
-            <a:avLst/>
-          </a:prstGeom>
-          <a:noFill/>
-          <a:ln/>
-        </p:spPr>
-        <p:txBody>
-          <a:bodyPr wrap="square" lIns="0" tIns="0" rIns="0" bIns="0" rtlCol="0" anchor="ctr"/>
-          <a:lstStyle/>
-          <a:p>
-            <a:pPr marL="0" indent="0">
-              <a:buNone/>
-            </a:pPr>
-            <a:r>
-              <a:rPr lang="en-US" sz="1150" b="1" dirty="0">
+            <a:endParaRPr lang="en-US" sz="1500" dirty="0"/>
+          </a:p>
+        </p:txBody>
+      </p:sp>
+      <p:sp>
+        <p:nvSpPr>
+          <p:cNvPr id="308" name="Lead Title"/>
+          <p:cNvSpPr/>
+          <p:nvPr/>
+        </p:nvSpPr>
+        <p:spPr>
+          <a:xfrm>
+            <a:off x="1490472" y="2459736"/>
+            <a:ext cx="4361688" cy="246888"/>
+          </a:xfrm>
+          <a:prstGeom prst="rect">
+            <a:avLst/>
+          </a:prstGeom>
+          <a:noFill/>
+          <a:ln/>
+        </p:spPr>
+        <p:txBody>
+          <a:bodyPr wrap="square" lIns="0" tIns="0" rIns="0" bIns="0" rtlCol="0" anchor="t"/>
+          <a:lstStyle/>
+          <a:p>
+            <a:pPr marL="0" indent="0" algn="l">
+              <a:buNone/>
+            </a:pPr>
+            <a:r>
+              <a:rPr lang="en-US" sz="1050" kern="0" dirty="0">
                 <a:solidFill>
                   <a:srgbClr val="8F7346"/>
                 </a:solidFill>
@@ -2381,58 +2162,22 @@
                 <a:ea typeface="Calibri" pitchFamily="34" charset="-122"/>
                 <a:cs typeface="Calibri" pitchFamily="34" charset="-120"/>
               </a:rPr>
-              <a:t>FOUNDER · PRINCIPAL · OUTSOURCED CFO</a:t>
-            </a:r>
-            <a:endParaRPr lang="en-US" sz="1150" dirty="0"/>
-          </a:p>
-        </p:txBody>
-      </p:sp>
-      <p:sp>
-        <p:nvSpPr>
-          <p:cNvPr id="10" name="Shape 7"/>
-          <p:cNvSpPr/>
-          <p:nvPr/>
-        </p:nvSpPr>
-        <p:spPr>
-          <a:xfrm>
-            <a:off x="8930640" y="1719072"/>
-            <a:ext cx="2712720" cy="1005840"/>
-          </a:xfrm>
-          <a:prstGeom prst="roundRect">
-            <a:avLst>
-              <a:gd name="adj" fmla="val 2745"/>
-            </a:avLst>
-          </a:prstGeom>
-          <a:solidFill>
-            <a:srgbClr val="F5F5F4"/>
-          </a:solidFill>
-          <a:ln/>
-          <a:effectLst>
-            <a:outerShdw blurRad="88900" dist="25400" dir="5400000" algn="bl" rotWithShape="0">
-              <a:srgbClr val="000000">
-                <a:alpha val="13000"/>
-              </a:srgbClr>
-            </a:outerShdw>
-          </a:effectLst>
-        </p:spPr>
-        <p:txBody>
-          <a:bodyPr/>
-          <a:lstStyle/>
-          <a:p>
-            <a:endParaRPr lang="en-US"/>
-          </a:p>
-        </p:txBody>
-      </p:sp>
-      <p:sp>
-        <p:nvSpPr>
-          <p:cNvPr id="11" name="Shape 8"/>
-          <p:cNvSpPr/>
-          <p:nvPr/>
-        </p:nvSpPr>
-        <p:spPr>
-          <a:xfrm>
-            <a:off x="9067800" y="1901952"/>
-            <a:ext cx="365760" cy="365760"/>
+              <a:t>Founder · Outsourced CFO</a:t>
+            </a:r>
+            <a:endParaRPr lang="en-US" sz="1050" dirty="0"/>
+          </a:p>
+        </p:txBody>
+      </p:sp>
+      <p:sp>
+        <p:nvSpPr>
+          <p:cNvPr id="309" name="Lead Circle"/>
+          <p:cNvSpPr/>
+          <p:nvPr/>
+        </p:nvSpPr>
+        <p:spPr>
+          <a:xfrm>
+            <a:off x="6309360" y="2194560"/>
+            <a:ext cx="502920" cy="502920"/>
           </a:xfrm>
           <a:prstGeom prst="ellipse">
             <a:avLst/>
@@ -2452,7 +2197,7 @@
       </p:sp>
       <p:pic>
         <p:nvPicPr>
-          <p:cNvPr id="12" name="Image 1" descr="/sessions/blissful-awesome-feynman/build/icons/user.png"/>
+          <p:cNvPr id="310" name="Lead Icon"/>
           <p:cNvPicPr>
             <a:picLocks noChangeAspect="1"/>
           </p:cNvPicPr>
@@ -2466,8 +2211,8 @@
         </p:blipFill>
         <p:spPr>
           <a:xfrm>
-            <a:off x="9163050" y="1997202"/>
-            <a:ext cx="175260" cy="175260"/>
+            <a:off x="6451092" y="2336292"/>
+            <a:ext cx="219456" cy="219456"/>
           </a:xfrm>
           <a:prstGeom prst="rect">
             <a:avLst/>
@@ -2476,69 +2221,69 @@
       </p:pic>
       <p:sp>
         <p:nvSpPr>
-          <p:cNvPr id="13" name="Text 9"/>
-          <p:cNvSpPr/>
-          <p:nvPr/>
-        </p:nvSpPr>
-        <p:spPr>
-          <a:xfrm>
-            <a:off x="9570720" y="1865376"/>
-            <a:ext cx="2011680" cy="292608"/>
-          </a:xfrm>
-          <a:prstGeom prst="rect">
-            <a:avLst/>
-          </a:prstGeom>
-          <a:noFill/>
-          <a:ln/>
-        </p:spPr>
-        <p:txBody>
-          <a:bodyPr wrap="square" lIns="0" tIns="0" rIns="0" bIns="0" rtlCol="0" anchor="ctr"/>
-          <a:lstStyle/>
-          <a:p>
-            <a:pPr marL="0" indent="0">
-              <a:buNone/>
-            </a:pPr>
-            <a:r>
-              <a:rPr lang="en-US" sz="1600" b="1" dirty="0">
+          <p:cNvPr id="311" name="Lead Name"/>
+          <p:cNvSpPr/>
+          <p:nvPr/>
+        </p:nvSpPr>
+        <p:spPr>
+          <a:xfrm>
+            <a:off x="6958584" y="2185416"/>
+            <a:ext cx="4361688" cy="274320"/>
+          </a:xfrm>
+          <a:prstGeom prst="rect">
+            <a:avLst/>
+          </a:prstGeom>
+          <a:noFill/>
+          <a:ln/>
+        </p:spPr>
+        <p:txBody>
+          <a:bodyPr wrap="square" lIns="0" tIns="0" rIns="0" bIns="0" rtlCol="0" anchor="t"/>
+          <a:lstStyle/>
+          <a:p>
+            <a:pPr marL="0" indent="0" algn="l">
+              <a:buNone/>
+            </a:pPr>
+            <a:r>
+              <a:rPr lang="en-US" sz="1500" b="1" kern="0" dirty="0">
                 <a:solidFill>
                   <a:srgbClr val="212121"/>
                 </a:solidFill>
-                <a:latin typeface="Calibri" pitchFamily="34" charset="0"/>
-                <a:ea typeface="Calibri" pitchFamily="34" charset="-122"/>
-                <a:cs typeface="Calibri" pitchFamily="34" charset="-120"/>
+                <a:latin typeface="Cambria" pitchFamily="34" charset="0"/>
+                <a:ea typeface="Cambria" pitchFamily="34" charset="-122"/>
+                <a:cs typeface="Cambria" pitchFamily="34" charset="-120"/>
               </a:rPr>
               <a:t>Josephine Mack</a:t>
             </a:r>
-            <a:endParaRPr lang="en-US" sz="1600" dirty="0"/>
-          </a:p>
-        </p:txBody>
-      </p:sp>
-      <p:sp>
-        <p:nvSpPr>
-          <p:cNvPr id="14" name="Text 10"/>
-          <p:cNvSpPr/>
-          <p:nvPr/>
-        </p:nvSpPr>
-        <p:spPr>
-          <a:xfrm>
-            <a:off x="9570720" y="2139696"/>
-            <a:ext cx="1980000" cy="457200"/>
-          </a:xfrm>
-          <a:prstGeom prst="rect">
-            <a:avLst/>
-          </a:prstGeom>
-          <a:noFill/>
-          <a:ln/>
-        </p:spPr>
-        <p:txBody>
-          <a:bodyPr wrap="square" lIns="0" tIns="0" rIns="0" bIns="0" rtlCol="0" anchor="ctr"/>
-          <a:lstStyle/>
-          <a:p>
-            <a:pPr marL="0" indent="0">
-              <a:buNone/>
-            </a:pPr>
-            <a:r>
-              <a:rPr lang="en-US" sz="1150" b="1" dirty="0">
+            <a:endParaRPr lang="en-US" sz="1500" dirty="0"/>
+          </a:p>
+        </p:txBody>
+      </p:sp>
+      <p:sp>
+        <p:nvSpPr>
+          <p:cNvPr id="312" name="Lead Title"/>
+          <p:cNvSpPr/>
+          <p:nvPr/>
+        </p:nvSpPr>
+        <p:spPr>
+          <a:xfrm>
+            <a:off x="6958584" y="2459736"/>
+            <a:ext cx="4361688" cy="246888"/>
+          </a:xfrm>
+          <a:prstGeom prst="rect">
+            <a:avLst/>
+          </a:prstGeom>
+          <a:noFill/>
+          <a:ln/>
+        </p:spPr>
+        <p:txBody>
+          <a:bodyPr wrap="square" lIns="0" tIns="0" rIns="0" bIns="0" rtlCol="0" anchor="t"/>
+          <a:lstStyle/>
+          <a:p>
+            <a:pPr marL="0" indent="0" algn="l">
+              <a:buNone/>
+            </a:pPr>
+            <a:r>
+              <a:rPr lang="en-US" sz="1050" kern="0" dirty="0">
                 <a:solidFill>
                   <a:srgbClr val="8F7346"/>
                 </a:solidFill>
@@ -2546,231 +2291,29 @@
                 <a:ea typeface="Calibri" pitchFamily="34" charset="-122"/>
                 <a:cs typeface="Calibri" pitchFamily="34" charset="-120"/>
               </a:rPr>
-              <a:t>EXEC ADMIN · CHIEF OF STAFF · CLIENT RELATIONS</a:t>
-            </a:r>
-            <a:endParaRPr lang="en-US" sz="1150" dirty="0"/>
-          </a:p>
-        </p:txBody>
-      </p:sp>
-      <p:sp>
-        <p:nvSpPr>
-          <p:cNvPr id="16" name="Shape 12"/>
-          <p:cNvSpPr/>
-          <p:nvPr/>
-        </p:nvSpPr>
-        <p:spPr>
-          <a:xfrm>
-            <a:off x="6035040" y="3090672"/>
-            <a:ext cx="2712720" cy="1188720"/>
-          </a:xfrm>
-          <a:prstGeom prst="roundRect">
-            <a:avLst>
-              <a:gd name="adj" fmla="val 4000"/>
-            </a:avLst>
-          </a:prstGeom>
-          <a:solidFill>
-            <a:srgbClr val="F5F5F4"/>
-          </a:solidFill>
-          <a:ln/>
-          <a:effectLst>
-            <a:outerShdw blurRad="88900" dist="25400" dir="5400000" algn="bl" rotWithShape="0">
-              <a:srgbClr val="000000">
-                <a:alpha val="13000"/>
-              </a:srgbClr>
-            </a:outerShdw>
-          </a:effectLst>
-        </p:spPr>
-        <p:txBody>
-          <a:bodyPr/>
-          <a:lstStyle/>
-          <a:p>
-            <a:endParaRPr lang="en-US"/>
-          </a:p>
-        </p:txBody>
-      </p:sp>
-      <p:sp>
-        <p:nvSpPr>
-          <p:cNvPr id="21" name="Shape 16"/>
-          <p:cNvSpPr/>
-          <p:nvPr/>
-        </p:nvSpPr>
-        <p:spPr>
-          <a:xfrm>
-            <a:off x="8930640" y="3090672"/>
-            <a:ext cx="2712720" cy="1188720"/>
-          </a:xfrm>
-          <a:prstGeom prst="roundRect">
-            <a:avLst>
-              <a:gd name="adj" fmla="val 4000"/>
-            </a:avLst>
-          </a:prstGeom>
-          <a:solidFill>
-            <a:srgbClr val="F5F5F4"/>
-          </a:solidFill>
-          <a:ln/>
-          <a:effectLst>
-            <a:outerShdw blurRad="88900" dist="25400" dir="5400000" algn="bl" rotWithShape="0">
-              <a:srgbClr val="000000">
-                <a:alpha val="13000"/>
-              </a:srgbClr>
-            </a:outerShdw>
-          </a:effectLst>
-        </p:spPr>
-        <p:txBody>
-          <a:bodyPr/>
-          <a:lstStyle/>
-          <a:p>
-            <a:endParaRPr lang="en-US"/>
-          </a:p>
-        </p:txBody>
-      </p:sp>
-      <p:sp>
-        <p:nvSpPr>
-          <p:cNvPr id="401" name="US Team Text"/>
-          <p:cNvSpPr/>
-          <p:nvPr/>
-        </p:nvSpPr>
-        <p:spPr>
-          <a:xfrm>
-            <a:off x="6035040" y="3316056"/>
-            <a:ext cx="2712720" cy="731520"/>
-          </a:xfrm>
-          <a:prstGeom prst="rect">
-            <a:avLst/>
-          </a:prstGeom>
-          <a:noFill/>
-          <a:ln/>
-        </p:spPr>
-        <p:txBody>
-          <a:bodyPr wrap="square" lIns="0" tIns="0" rIns="0" bIns="0" rtlCol="0" anchor="t"/>
-          <a:lstStyle/>
-          <a:p>
-            <a:pPr marL="0" indent="0" algn="ctr">
-              <a:lnSpc>
-                <a:spcPct val="112000"/>
-              </a:lnSpc>
-              <a:buNone/>
-            </a:pPr>
-            <a:r>
-              <a:rPr lang="en-US" sz="1100" b="1" kern="0" spc="300" dirty="0">
-                <a:solidFill>
-                  <a:srgbClr val="B08D57"/>
-                </a:solidFill>
-                <a:latin typeface="Calibri" pitchFamily="34" charset="0"/>
-                <a:ea typeface="Calibri" pitchFamily="34" charset="-122"/>
-                <a:cs typeface="Calibri" pitchFamily="34" charset="-120"/>
-              </a:rPr>
-              <a:t>US TEAM</a:t>
-            </a:r>
-            <a:endParaRPr lang="en-US" dirty="0"/>
-          </a:p>
-          <a:p>
-            <a:pPr marL="0" indent="0" algn="ctr">
-              <a:lnSpc>
-                <a:spcPct val="112000"/>
-              </a:lnSpc>
-              <a:spcBef>
-                <a:spcPts val="600"/>
-              </a:spcBef>
-              <a:buNone/>
-            </a:pPr>
-            <a:r>
-              <a:rPr lang="en-US" sz="1050" dirty="0">
-                <a:solidFill>
-                  <a:srgbClr val="5F5F5F"/>
-                </a:solidFill>
-                <a:latin typeface="Calibri" pitchFamily="34" charset="0"/>
-                <a:ea typeface="Calibri" pitchFamily="34" charset="-122"/>
-                <a:cs typeface="Calibri" pitchFamily="34" charset="-120"/>
-              </a:rPr>
-              <a:t>Management &amp; staff</a:t>
-            </a:r>
-            <a:endParaRPr lang="en-US" dirty="0"/>
-          </a:p>
-        </p:txBody>
-      </p:sp>
-      <p:sp>
-        <p:nvSpPr>
-          <p:cNvPr id="402" name="EU Team Text"/>
-          <p:cNvSpPr/>
-          <p:nvPr/>
-        </p:nvSpPr>
-        <p:spPr>
-          <a:xfrm>
-            <a:off x="8930640" y="3316056"/>
-            <a:ext cx="2712720" cy="731520"/>
-          </a:xfrm>
-          <a:prstGeom prst="rect">
-            <a:avLst/>
-          </a:prstGeom>
-          <a:noFill/>
-          <a:ln/>
-        </p:spPr>
-        <p:txBody>
-          <a:bodyPr wrap="square" lIns="0" tIns="0" rIns="0" bIns="0" rtlCol="0" anchor="t"/>
-          <a:lstStyle/>
-          <a:p>
-            <a:pPr marL="0" indent="0" algn="ctr">
-              <a:lnSpc>
-                <a:spcPct val="112000"/>
-              </a:lnSpc>
-              <a:buNone/>
-            </a:pPr>
-            <a:r>
-              <a:rPr lang="en-US" sz="1100" b="1" kern="0" spc="300" dirty="0">
-                <a:solidFill>
-                  <a:srgbClr val="B08D57"/>
-                </a:solidFill>
-                <a:latin typeface="Calibri" pitchFamily="34" charset="0"/>
-                <a:ea typeface="Calibri" pitchFamily="34" charset="-122"/>
-                <a:cs typeface="Calibri" pitchFamily="34" charset="-120"/>
-              </a:rPr>
-              <a:t>EUROPEAN TEAM</a:t>
-            </a:r>
-            <a:endParaRPr lang="en-US" dirty="0"/>
-          </a:p>
-          <a:p>
-            <a:pPr marL="0" indent="0" algn="ctr">
-              <a:lnSpc>
-                <a:spcPct val="112000"/>
-              </a:lnSpc>
-              <a:spcBef>
-                <a:spcPts val="600"/>
-              </a:spcBef>
-              <a:buNone/>
-            </a:pPr>
-            <a:r>
-              <a:rPr lang="en-US" sz="1050" dirty="0">
-                <a:solidFill>
-                  <a:srgbClr val="5F5F5F"/>
-                </a:solidFill>
-                <a:latin typeface="Calibri" pitchFamily="34" charset="0"/>
-                <a:ea typeface="Calibri" pitchFamily="34" charset="-122"/>
-                <a:cs typeface="Calibri" pitchFamily="34" charset="-120"/>
-              </a:rPr>
-              <a:t>Staff &amp; support · Global IT</a:t>
-            </a:r>
-            <a:endParaRPr lang="en-US" dirty="0"/>
+              <a:t>Chief of Staff · Client Relations</a:t>
+            </a:r>
+            <a:endParaRPr lang="en-US" sz="1050" dirty="0"/>
           </a:p>
         </p:txBody>
       </p:sp>
       <p:cxnSp>
         <p:nvCxnSpPr>
-          <p:cNvPr id="403" name="Org V1"/>
+          <p:cNvPr id="313" name="Panel Rule"/>
           <p:cNvCxnSpPr/>
           <p:nvPr/>
         </p:nvCxnSpPr>
         <p:spPr>
           <a:xfrm>
-            <a:off x="7391400" y="2724912"/>
-            <a:ext cx="0" cy="365760"/>
+            <a:off x="841248" y="2697480"/>
+            <a:ext cx="10479024" cy="0"/>
           </a:xfrm>
           <a:prstGeom prst="line">
             <a:avLst/>
           </a:prstGeom>
-          <a:ln w="12700">
+          <a:ln w="9525">
             <a:solidFill>
-              <a:srgbClr val="C9B08A"/>
+              <a:srgbClr val="E0E0E0"/>
             </a:solidFill>
           </a:ln>
         </p:spPr>
@@ -2791,21 +2334,21 @@
       </p:cxnSp>
       <p:cxnSp>
         <p:nvCxnSpPr>
-          <p:cNvPr id="404" name="Org V2"/>
+          <p:cNvPr id="314" name="Team Divider"/>
           <p:cNvCxnSpPr/>
           <p:nvPr/>
         </p:nvCxnSpPr>
         <p:spPr>
           <a:xfrm>
-            <a:off x="10287000" y="2724912"/>
-            <a:ext cx="0" cy="365760"/>
+            <a:off x="6080760" y="3063240"/>
+            <a:ext cx="0" cy="685800"/>
           </a:xfrm>
           <a:prstGeom prst="line">
             <a:avLst/>
           </a:prstGeom>
-          <a:ln w="12700">
+          <a:ln w="9525">
             <a:solidFill>
-              <a:srgbClr val="C9B08A"/>
+              <a:srgbClr val="E0E0E0"/>
             </a:solidFill>
           </a:ln>
         </p:spPr>
@@ -2824,23 +2367,225 @@
           </a:fontRef>
         </p:style>
       </p:cxnSp>
+      <p:sp>
+        <p:nvSpPr>
+          <p:cNvPr id="315" name="Team Label"/>
+          <p:cNvSpPr/>
+          <p:nvPr/>
+        </p:nvSpPr>
+        <p:spPr>
+          <a:xfrm>
+            <a:off x="841248" y="3063240"/>
+            <a:ext cx="5010912" cy="274320"/>
+          </a:xfrm>
+          <a:prstGeom prst="rect">
+            <a:avLst/>
+          </a:prstGeom>
+          <a:noFill/>
+          <a:ln/>
+        </p:spPr>
+        <p:txBody>
+          <a:bodyPr wrap="square" lIns="0" tIns="0" rIns="0" bIns="0" rtlCol="0" anchor="t"/>
+          <a:lstStyle/>
+          <a:p>
+            <a:pPr marL="0" indent="0" algn="l">
+              <a:buNone/>
+            </a:pPr>
+            <a:r>
+              <a:rPr lang="en-US" sz="1100" b="1" kern="0" spc="200" dirty="0">
+                <a:solidFill>
+                  <a:srgbClr val="8F7346"/>
+                </a:solidFill>
+                <a:latin typeface="Calibri" pitchFamily="34" charset="0"/>
+                <a:ea typeface="Calibri" pitchFamily="34" charset="-122"/>
+                <a:cs typeface="Calibri" pitchFamily="34" charset="-120"/>
+              </a:rPr>
+              <a:t>UNITED STATES · SCOTTSDALE</a:t>
+            </a:r>
+            <a:endParaRPr lang="en-US" sz="1100" dirty="0"/>
+          </a:p>
+        </p:txBody>
+      </p:sp>
+      <p:sp>
+        <p:nvSpPr>
+          <p:cNvPr id="316" name="Team Body"/>
+          <p:cNvSpPr/>
+          <p:nvPr/>
+        </p:nvSpPr>
+        <p:spPr>
+          <a:xfrm>
+            <a:off x="841248" y="3337560"/>
+            <a:ext cx="5010912" cy="411480"/>
+          </a:xfrm>
+          <a:prstGeom prst="rect">
+            <a:avLst/>
+          </a:prstGeom>
+          <a:noFill/>
+          <a:ln/>
+        </p:spPr>
+        <p:txBody>
+          <a:bodyPr wrap="square" lIns="0" tIns="0" rIns="0" bIns="0" rtlCol="0" anchor="t"/>
+          <a:lstStyle/>
+          <a:p>
+            <a:pPr marL="0" indent="0" algn="l">
+              <a:lnSpc>
+                <a:spcPct val="118000"/>
+              </a:lnSpc>
+              <a:buNone/>
+            </a:pPr>
+            <a:r>
+              <a:rPr lang="en-US" sz="1000" kern="0" dirty="0">
+                <a:solidFill>
+                  <a:srgbClr val="5F5F5F"/>
+                </a:solidFill>
+                <a:latin typeface="Calibri" pitchFamily="34" charset="0"/>
+                <a:ea typeface="Calibri" pitchFamily="34" charset="-122"/>
+                <a:cs typeface="Calibri" pitchFamily="34" charset="-120"/>
+              </a:rPr>
+              <a:t>Leadership, controller and CFO work, and the client relationship.</a:t>
+            </a:r>
+            <a:endParaRPr lang="en-US" sz="1000" dirty="0"/>
+          </a:p>
+          <a:p>
+            <a:pPr marL="0" indent="0" algn="l">
+              <a:lnSpc>
+                <a:spcPct val="118000"/>
+              </a:lnSpc>
+              <a:buNone/>
+            </a:pPr>
+            <a:r>
+              <a:rPr lang="en-US" sz="1000" kern="0" dirty="0">
+                <a:solidFill>
+                  <a:srgbClr val="5F5F5F"/>
+                </a:solidFill>
+                <a:latin typeface="Calibri" pitchFamily="34" charset="0"/>
+                <a:ea typeface="Calibri" pitchFamily="34" charset="-122"/>
+                <a:cs typeface="Calibri" pitchFamily="34" charset="-120"/>
+              </a:rPr>
+              <a:t>Every accountant on the team: 10+ years minimum.</a:t>
+            </a:r>
+            <a:endParaRPr lang="en-US" sz="1000" dirty="0"/>
+          </a:p>
+        </p:txBody>
+      </p:sp>
+      <p:sp>
+        <p:nvSpPr>
+          <p:cNvPr id="317" name="Team Label"/>
+          <p:cNvSpPr/>
+          <p:nvPr/>
+        </p:nvSpPr>
+        <p:spPr>
+          <a:xfrm>
+            <a:off x="6309360" y="3063240"/>
+            <a:ext cx="5010912" cy="274320"/>
+          </a:xfrm>
+          <a:prstGeom prst="rect">
+            <a:avLst/>
+          </a:prstGeom>
+          <a:noFill/>
+          <a:ln/>
+        </p:spPr>
+        <p:txBody>
+          <a:bodyPr wrap="square" lIns="0" tIns="0" rIns="0" bIns="0" rtlCol="0" anchor="t"/>
+          <a:lstStyle/>
+          <a:p>
+            <a:pPr marL="0" indent="0" algn="l">
+              <a:buNone/>
+            </a:pPr>
+            <a:r>
+              <a:rPr lang="en-US" sz="1100" b="1" kern="0" spc="200" dirty="0">
+                <a:solidFill>
+                  <a:srgbClr val="8F7346"/>
+                </a:solidFill>
+                <a:latin typeface="Calibri" pitchFamily="34" charset="0"/>
+                <a:ea typeface="Calibri" pitchFamily="34" charset="-122"/>
+                <a:cs typeface="Calibri" pitchFamily="34" charset="-120"/>
+              </a:rPr>
+              <a:t>EUROPE</a:t>
+            </a:r>
+            <a:endParaRPr lang="en-US" sz="1100" dirty="0"/>
+          </a:p>
+        </p:txBody>
+      </p:sp>
+      <p:sp>
+        <p:nvSpPr>
+          <p:cNvPr id="318" name="Team Body"/>
+          <p:cNvSpPr/>
+          <p:nvPr/>
+        </p:nvSpPr>
+        <p:spPr>
+          <a:xfrm>
+            <a:off x="6309360" y="3337560"/>
+            <a:ext cx="5010912" cy="411480"/>
+          </a:xfrm>
+          <a:prstGeom prst="rect">
+            <a:avLst/>
+          </a:prstGeom>
+          <a:noFill/>
+          <a:ln/>
+        </p:spPr>
+        <p:txBody>
+          <a:bodyPr wrap="square" lIns="0" tIns="0" rIns="0" bIns="0" rtlCol="0" anchor="t"/>
+          <a:lstStyle/>
+          <a:p>
+            <a:pPr marL="0" indent="0" algn="l">
+              <a:lnSpc>
+                <a:spcPct val="118000"/>
+              </a:lnSpc>
+              <a:buNone/>
+            </a:pPr>
+            <a:r>
+              <a:rPr lang="en-US" sz="1000" kern="0" dirty="0">
+                <a:solidFill>
+                  <a:srgbClr val="5F5F5F"/>
+                </a:solidFill>
+                <a:latin typeface="Calibri" pitchFamily="34" charset="0"/>
+                <a:ea typeface="Calibri" pitchFamily="34" charset="-122"/>
+                <a:cs typeface="Calibri" pitchFamily="34" charset="-120"/>
+              </a:rPr>
+              <a:t>Staff accounting: transaction detail, reconciliations and close support.</a:t>
+            </a:r>
+            <a:endParaRPr lang="en-US" sz="1000" dirty="0"/>
+          </a:p>
+          <a:p>
+            <a:pPr marL="0" indent="0" algn="l">
+              <a:lnSpc>
+                <a:spcPct val="118000"/>
+              </a:lnSpc>
+              <a:buNone/>
+            </a:pPr>
+            <a:r>
+              <a:rPr lang="en-US" sz="1000" kern="0" dirty="0">
+                <a:solidFill>
+                  <a:srgbClr val="5F5F5F"/>
+                </a:solidFill>
+                <a:latin typeface="Calibri" pitchFamily="34" charset="0"/>
+                <a:ea typeface="Calibri" pitchFamily="34" charset="-122"/>
+                <a:cs typeface="Calibri" pitchFamily="34" charset="-120"/>
+              </a:rPr>
+              <a:t>Plus firm-wide support and global IT.</a:t>
+            </a:r>
+            <a:endParaRPr lang="en-US" sz="1000" dirty="0"/>
+          </a:p>
+        </p:txBody>
+      </p:sp>
       <p:cxnSp>
         <p:nvCxnSpPr>
-          <p:cNvPr id="405" name="Org Rail"/>
+          <p:cNvPr id="319" name="Cred Rule"/>
           <p:cNvCxnSpPr/>
           <p:nvPr/>
         </p:nvCxnSpPr>
         <p:spPr>
           <a:xfrm>
-            <a:off x="7391400" y="2907792"/>
-            <a:ext cx="2895600" cy="0"/>
+            <a:off x="548640" y="4297680"/>
+            <a:ext cx="11064240" cy="0"/>
           </a:xfrm>
           <a:prstGeom prst="line">
             <a:avLst/>
           </a:prstGeom>
-          <a:ln w="12700">
+          <a:ln w="9525">
             <a:solidFill>
-              <a:srgbClr val="C9B08A"/>
+              <a:srgbClr val="E0E0E0"/>
             </a:solidFill>
           </a:ln>
         </p:spPr>
@@ -2859,228 +2604,74 @@
           </a:fontRef>
         </p:style>
       </p:cxnSp>
-      <p:cxnSp>
-        <p:nvCxnSpPr>
-          <p:cNvPr id="406" name="Stat Div 1"/>
-          <p:cNvCxnSpPr/>
-          <p:nvPr/>
-        </p:nvCxnSpPr>
-        <p:spPr>
-          <a:xfrm>
-            <a:off x="548640" y="2567052"/>
-            <a:ext cx="4572000" cy="0"/>
-          </a:xfrm>
-          <a:prstGeom prst="line">
-            <a:avLst/>
-          </a:prstGeom>
-          <a:ln w="9525">
-            <a:solidFill>
-              <a:srgbClr val="E0E0E0"/>
-            </a:solidFill>
-          </a:ln>
-        </p:spPr>
-        <p:style>
-          <a:lnRef idx="1">
-            <a:schemeClr val="accent1"/>
-          </a:lnRef>
-          <a:fillRef idx="0">
-            <a:schemeClr val="accent1"/>
-          </a:fillRef>
-          <a:effectRef idx="0">
-            <a:schemeClr val="accent1"/>
-          </a:effectRef>
-          <a:fontRef idx="minor">
-            <a:schemeClr val="tx1"/>
-          </a:fontRef>
-        </p:style>
-      </p:cxnSp>
-      <p:cxnSp>
-        <p:nvCxnSpPr>
-          <p:cNvPr id="407" name="Stat Div 2"/>
-          <p:cNvCxnSpPr/>
-          <p:nvPr/>
-        </p:nvCxnSpPr>
-        <p:spPr>
-          <a:xfrm>
-            <a:off x="548640" y="3760138"/>
-            <a:ext cx="4572000" cy="0"/>
-          </a:xfrm>
-          <a:prstGeom prst="line">
-            <a:avLst/>
-          </a:prstGeom>
-          <a:ln w="9525">
-            <a:solidFill>
-              <a:srgbClr val="E0E0E0"/>
-            </a:solidFill>
-          </a:ln>
-        </p:spPr>
-        <p:style>
-          <a:lnRef idx="1">
-            <a:schemeClr val="accent1"/>
-          </a:lnRef>
-          <a:fillRef idx="0">
-            <a:schemeClr val="accent1"/>
-          </a:fillRef>
-          <a:effectRef idx="0">
-            <a:schemeClr val="accent1"/>
-          </a:effectRef>
-          <a:fontRef idx="minor">
-            <a:schemeClr val="tx1"/>
-          </a:fontRef>
-        </p:style>
-      </p:cxnSp>
-      <p:sp>
-        <p:nvSpPr>
-          <p:cNvPr id="408" name="Intuit Chip"/>
-          <p:cNvSpPr/>
-          <p:nvPr/>
-        </p:nvSpPr>
-        <p:spPr>
-          <a:xfrm>
-            <a:off x="548640" y="4800600"/>
-            <a:ext cx="5395240" cy="822960"/>
-          </a:xfrm>
-          <a:prstGeom prst="roundRect">
-            <a:avLst>
-              <a:gd name="adj" fmla="val 4000"/>
-            </a:avLst>
-          </a:prstGeom>
-          <a:solidFill>
-            <a:srgbClr val="F5F5F4"/>
-          </a:solidFill>
-          <a:ln/>
-          <a:effectLst>
-            <a:outerShdw blurRad="88900" dist="25400" dir="5400000" algn="bl" rotWithShape="0">
-              <a:srgbClr val="000000">
-                <a:alpha val="13000"/>
-              </a:srgbClr>
-            </a:outerShdw>
-          </a:effectLst>
-        </p:spPr>
-        <p:txBody>
-          <a:bodyPr/>
-          <a:lstStyle/>
-          <a:p>
-            <a:endParaRPr lang="en-US"/>
-          </a:p>
-        </p:txBody>
-      </p:sp>
-      <p:sp>
-        <p:nvSpPr>
-          <p:cNvPr id="409" name="Experience Chip"/>
-          <p:cNvSpPr/>
-          <p:nvPr/>
-        </p:nvSpPr>
-        <p:spPr>
-          <a:xfrm>
-            <a:off x="6248400" y="4800600"/>
-            <a:ext cx="5395240" cy="822960"/>
-          </a:xfrm>
-          <a:prstGeom prst="roundRect">
-            <a:avLst>
-              <a:gd name="adj" fmla="val 4000"/>
-            </a:avLst>
-          </a:prstGeom>
-          <a:solidFill>
-            <a:srgbClr val="F5F5F4"/>
-          </a:solidFill>
-          <a:ln/>
-          <a:effectLst>
-            <a:outerShdw blurRad="88900" dist="25400" dir="5400000" algn="bl" rotWithShape="0">
-              <a:srgbClr val="000000">
-                <a:alpha val="13000"/>
-              </a:srgbClr>
-            </a:outerShdw>
-          </a:effectLst>
-        </p:spPr>
-        <p:txBody>
-          <a:bodyPr/>
-          <a:lstStyle/>
-          <a:p>
-            <a:endParaRPr lang="en-US"/>
-          </a:p>
-        </p:txBody>
-      </p:sp>
-      <p:sp>
-        <p:nvSpPr>
-          <p:cNvPr id="410" name="QB Badge"/>
-          <p:cNvSpPr/>
-          <p:nvPr/>
-        </p:nvSpPr>
-        <p:spPr>
-          <a:xfrm>
-            <a:off x="822960" y="4983480"/>
-            <a:ext cx="457200" cy="457200"/>
-          </a:xfrm>
-          <a:prstGeom prst="ellipse">
-            <a:avLst/>
-          </a:prstGeom>
-          <a:solidFill>
-            <a:srgbClr val="2CA01C"/>
-          </a:solidFill>
-        </p:spPr>
-        <p:txBody>
-          <a:bodyPr wrap="square" lIns="0" tIns="0" rIns="0" bIns="0" rtlCol="0" anchor="ctr"/>
-          <a:lstStyle/>
-          <a:p>
-            <a:pPr marL="0" indent="0" algn="ctr">
-              <a:buNone/>
-            </a:pPr>
-            <a:r>
-              <a:rPr lang="en-US" sz="1400" b="1" dirty="0">
-                <a:solidFill>
-                  <a:srgbClr val="FFFFFF"/>
-                </a:solidFill>
-                <a:latin typeface="Calibri" pitchFamily="34" charset="0"/>
-                <a:ea typeface="Calibri" pitchFamily="34" charset="-122"/>
-                <a:cs typeface="Calibri" pitchFamily="34" charset="-120"/>
-              </a:rPr>
-              <a:t>qb</a:t>
-            </a:r>
-            <a:endParaRPr lang="en-US" dirty="0"/>
-          </a:p>
-        </p:txBody>
-      </p:sp>
-      <p:sp>
-        <p:nvSpPr>
-          <p:cNvPr id="411" name="Intuit Text"/>
-          <p:cNvSpPr/>
-          <p:nvPr/>
-        </p:nvSpPr>
-        <p:spPr>
-          <a:xfrm>
-            <a:off x="1417320" y="4800600"/>
-            <a:ext cx="4389120" cy="822960"/>
-          </a:xfrm>
-          <a:prstGeom prst="rect">
-            <a:avLst/>
-          </a:prstGeom>
-          <a:noFill/>
-          <a:ln/>
-        </p:spPr>
-        <p:txBody>
-          <a:bodyPr wrap="square" lIns="0" tIns="0" rIns="0" bIns="0" rtlCol="0" anchor="ctr"/>
-          <a:lstStyle/>
-          <a:p>
-            <a:pPr marL="0" indent="0">
+      <p:sp>
+        <p:nvSpPr>
+          <p:cNvPr id="320" name="Cred Stat"/>
+          <p:cNvSpPr/>
+          <p:nvPr/>
+        </p:nvSpPr>
+        <p:spPr>
+          <a:xfrm>
+            <a:off x="548640" y="4617720"/>
+            <a:ext cx="2606040" cy="320040"/>
+          </a:xfrm>
+          <a:prstGeom prst="rect">
+            <a:avLst/>
+          </a:prstGeom>
+          <a:noFill/>
+          <a:ln/>
+        </p:spPr>
+        <p:txBody>
+          <a:bodyPr wrap="square" lIns="0" tIns="0" rIns="0" bIns="0" rtlCol="0" anchor="t"/>
+          <a:lstStyle/>
+          <a:p>
+            <a:pPr marL="0" indent="0" algn="l">
+              <a:buNone/>
+            </a:pPr>
+            <a:r>
+              <a:rPr lang="en-US" sz="1700" b="1" kern="0" dirty="0">
+                <a:solidFill>
+                  <a:srgbClr val="B08D57"/>
+                </a:solidFill>
+                <a:latin typeface="Cambria" pitchFamily="34" charset="0"/>
+                <a:ea typeface="Cambria" pitchFamily="34" charset="-122"/>
+                <a:cs typeface="Cambria" pitchFamily="34" charset="-120"/>
+              </a:rPr>
+              <a:t>TOP 10</a:t>
+            </a:r>
+            <a:endParaRPr lang="en-US" sz="1700" dirty="0"/>
+          </a:p>
+        </p:txBody>
+      </p:sp>
+      <p:sp>
+        <p:nvSpPr>
+          <p:cNvPr id="321" name="Cred Label"/>
+          <p:cNvSpPr/>
+          <p:nvPr/>
+        </p:nvSpPr>
+        <p:spPr>
+          <a:xfrm>
+            <a:off x="548640" y="4983480"/>
+            <a:ext cx="2606040" cy="548640"/>
+          </a:xfrm>
+          <a:prstGeom prst="rect">
+            <a:avLst/>
+          </a:prstGeom>
+          <a:noFill/>
+          <a:ln/>
+        </p:spPr>
+        <p:txBody>
+          <a:bodyPr wrap="square" lIns="0" tIns="0" rIns="0" bIns="0" rtlCol="0" anchor="t"/>
+          <a:lstStyle/>
+          <a:p>
+            <a:pPr marL="0" indent="0" algn="l">
               <a:lnSpc>
                 <a:spcPct val="112000"/>
               </a:lnSpc>
               <a:buNone/>
             </a:pPr>
             <a:r>
-              <a:rPr lang="en-US" sz="1200" b="1" dirty="0">
-                <a:solidFill>
-                  <a:srgbClr val="212121"/>
-                </a:solidFill>
-                <a:latin typeface="Calibri" pitchFamily="34" charset="0"/>
-                <a:ea typeface="Calibri" pitchFamily="34" charset="-122"/>
-                <a:cs typeface="Calibri" pitchFamily="34" charset="-120"/>
-              </a:rPr>
-              <a:t>Intuit QuickBooks Elite</a:t>
-            </a:r>
-            <a:r>
-              <a:rPr lang="en-US" sz="1150" dirty="0">
+              <a:rPr lang="en-US" sz="900" kern="0" dirty="0">
                 <a:solidFill>
                   <a:srgbClr val="5F5F5F"/>
                 </a:solidFill>
@@ -3088,52 +2679,80 @@
                 <a:ea typeface="Calibri" pitchFamily="34" charset="-122"/>
                 <a:cs typeface="Calibri" pitchFamily="34" charset="-120"/>
               </a:rPr>
-              <a:t> · the highest partnership tier</a:t>
-            </a:r>
-            <a:endParaRPr lang="en-US" dirty="0"/>
-          </a:p>
-        </p:txBody>
-      </p:sp>
-      <p:sp>
-        <p:nvSpPr>
-          <p:cNvPr id="412" name="Experience Text"/>
-          <p:cNvSpPr/>
-          <p:nvPr/>
-        </p:nvSpPr>
-        <p:spPr>
-          <a:xfrm>
-            <a:off x="7117080" y="4800600"/>
-            <a:ext cx="4389120" cy="822960"/>
-          </a:xfrm>
-          <a:prstGeom prst="rect">
-            <a:avLst/>
-          </a:prstGeom>
-          <a:noFill/>
-          <a:ln/>
-        </p:spPr>
-        <p:txBody>
-          <a:bodyPr wrap="square" lIns="0" tIns="0" rIns="0" bIns="0" rtlCol="0" anchor="ctr"/>
-          <a:lstStyle/>
-          <a:p>
-            <a:pPr marL="0" indent="0">
+              <a:t>former Directors &amp; Managers of Top 10 accounting firms</a:t>
+            </a:r>
+            <a:endParaRPr lang="en-US" sz="900" dirty="0"/>
+          </a:p>
+        </p:txBody>
+      </p:sp>
+      <p:sp>
+        <p:nvSpPr>
+          <p:cNvPr id="322" name="Cred Stat"/>
+          <p:cNvSpPr/>
+          <p:nvPr/>
+        </p:nvSpPr>
+        <p:spPr>
+          <a:xfrm>
+            <a:off x="3383280" y="4617720"/>
+            <a:ext cx="2606040" cy="320040"/>
+          </a:xfrm>
+          <a:prstGeom prst="rect">
+            <a:avLst/>
+          </a:prstGeom>
+          <a:noFill/>
+          <a:ln/>
+        </p:spPr>
+        <p:txBody>
+          <a:bodyPr wrap="square" lIns="0" tIns="0" rIns="0" bIns="0" rtlCol="0" anchor="t"/>
+          <a:lstStyle/>
+          <a:p>
+            <a:pPr marL="0" indent="0" algn="l">
+              <a:buNone/>
+            </a:pPr>
+            <a:r>
+              <a:rPr lang="en-US" sz="1700" b="1" kern="0" dirty="0">
+                <a:solidFill>
+                  <a:srgbClr val="B08D57"/>
+                </a:solidFill>
+                <a:latin typeface="Cambria" pitchFamily="34" charset="0"/>
+                <a:ea typeface="Cambria" pitchFamily="34" charset="-122"/>
+                <a:cs typeface="Cambria" pitchFamily="34" charset="-120"/>
+              </a:rPr>
+              <a:t>MULTI-INDUSTRY</a:t>
+            </a:r>
+            <a:endParaRPr lang="en-US" sz="1700" dirty="0"/>
+          </a:p>
+        </p:txBody>
+      </p:sp>
+      <p:sp>
+        <p:nvSpPr>
+          <p:cNvPr id="323" name="Cred Label"/>
+          <p:cNvSpPr/>
+          <p:nvPr/>
+        </p:nvSpPr>
+        <p:spPr>
+          <a:xfrm>
+            <a:off x="3383280" y="4983480"/>
+            <a:ext cx="2606040" cy="548640"/>
+          </a:xfrm>
+          <a:prstGeom prst="rect">
+            <a:avLst/>
+          </a:prstGeom>
+          <a:noFill/>
+          <a:ln/>
+        </p:spPr>
+        <p:txBody>
+          <a:bodyPr wrap="square" lIns="0" tIns="0" rIns="0" bIns="0" rtlCol="0" anchor="t"/>
+          <a:lstStyle/>
+          <a:p>
+            <a:pPr marL="0" indent="0" algn="l">
               <a:lnSpc>
                 <a:spcPct val="112000"/>
               </a:lnSpc>
               <a:buNone/>
             </a:pPr>
             <a:r>
-              <a:rPr lang="en-US" sz="1200" b="1" dirty="0">
-                <a:solidFill>
-                  <a:srgbClr val="212121"/>
-                </a:solidFill>
-                <a:latin typeface="Calibri" pitchFamily="34" charset="0"/>
-                <a:ea typeface="Calibri" pitchFamily="34" charset="-122"/>
-                <a:cs typeface="Calibri" pitchFamily="34" charset="-120"/>
-              </a:rPr>
-              <a:t>10+ years minimum experience</a:t>
-            </a:r>
-            <a:r>
-              <a:rPr lang="en-US" sz="1150" dirty="0">
+              <a:rPr lang="en-US" sz="900" kern="0" dirty="0">
                 <a:solidFill>
                   <a:srgbClr val="5F5F5F"/>
                 </a:solidFill>
@@ -3141,42 +2760,96 @@
                 <a:ea typeface="Calibri" pitchFamily="34" charset="-122"/>
                 <a:cs typeface="Calibri" pitchFamily="34" charset="-120"/>
               </a:rPr>
-              <a:t> · across every accountant on the team</a:t>
-            </a:r>
-            <a:endParaRPr lang="en-US" dirty="0"/>
-          </a:p>
-        </p:txBody>
-      </p:sp>
-      <p:sp>
-        <p:nvSpPr>
-          <p:cNvPr id="22" name="Shape 17"/>
-          <p:cNvSpPr/>
-          <p:nvPr/>
-        </p:nvSpPr>
-        <p:spPr>
-          <a:xfrm>
-            <a:off x="6522720" y="4983480"/>
-            <a:ext cx="457200" cy="457200"/>
-          </a:xfrm>
-          <a:prstGeom prst="ellipse">
-            <a:avLst/>
-          </a:prstGeom>
-          <a:solidFill>
-            <a:srgbClr val="B08D57"/>
-          </a:solidFill>
-          <a:ln/>
-        </p:spPr>
-        <p:txBody>
-          <a:bodyPr/>
-          <a:lstStyle/>
-          <a:p>
-            <a:endParaRPr lang="en-US"/>
+              <a:t>construction · real estate · property management · professional services · distribution</a:t>
+            </a:r>
+            <a:endParaRPr lang="en-US" sz="900" dirty="0"/>
+          </a:p>
+        </p:txBody>
+      </p:sp>
+      <p:sp>
+        <p:nvSpPr>
+          <p:cNvPr id="324" name="Cred Stat"/>
+          <p:cNvSpPr/>
+          <p:nvPr/>
+        </p:nvSpPr>
+        <p:spPr>
+          <a:xfrm>
+            <a:off x="6217920" y="4617720"/>
+            <a:ext cx="2606040" cy="320040"/>
+          </a:xfrm>
+          <a:prstGeom prst="rect">
+            <a:avLst/>
+          </a:prstGeom>
+          <a:noFill/>
+          <a:ln/>
+        </p:spPr>
+        <p:txBody>
+          <a:bodyPr wrap="square" lIns="0" tIns="0" rIns="0" bIns="0" rtlCol="0" anchor="t"/>
+          <a:lstStyle/>
+          <a:p>
+            <a:pPr marL="0" indent="0" algn="l">
+              <a:buNone/>
+            </a:pPr>
+            <a:r>
+              <a:rPr lang="en-US" sz="1700" b="1" kern="0" dirty="0">
+                <a:solidFill>
+                  <a:srgbClr val="B08D57"/>
+                </a:solidFill>
+                <a:latin typeface="Cambria" pitchFamily="34" charset="0"/>
+                <a:ea typeface="Cambria" pitchFamily="34" charset="-122"/>
+                <a:cs typeface="Cambria" pitchFamily="34" charset="-120"/>
+              </a:rPr>
+              <a:t>PRIVATE EQUITY</a:t>
+            </a:r>
+            <a:endParaRPr lang="en-US" sz="1700" dirty="0"/>
+          </a:p>
+        </p:txBody>
+      </p:sp>
+      <p:sp>
+        <p:nvSpPr>
+          <p:cNvPr id="325" name="Cred Label"/>
+          <p:cNvSpPr/>
+          <p:nvPr/>
+        </p:nvSpPr>
+        <p:spPr>
+          <a:xfrm>
+            <a:off x="6217920" y="4983480"/>
+            <a:ext cx="2606040" cy="548640"/>
+          </a:xfrm>
+          <a:prstGeom prst="rect">
+            <a:avLst/>
+          </a:prstGeom>
+          <a:noFill/>
+          <a:ln/>
+        </p:spPr>
+        <p:txBody>
+          <a:bodyPr wrap="square" lIns="0" tIns="0" rIns="0" bIns="0" rtlCol="0" anchor="t"/>
+          <a:lstStyle/>
+          <a:p>
+            <a:pPr marL="0" indent="0" algn="l">
+              <a:lnSpc>
+                <a:spcPct val="112000"/>
+              </a:lnSpc>
+              <a:buNone/>
+            </a:pPr>
+            <a:r>
+              <a:rPr lang="en-US" sz="900" kern="0" dirty="0">
+                <a:solidFill>
+                  <a:srgbClr val="5F5F5F"/>
+                </a:solidFill>
+                <a:latin typeface="Calibri" pitchFamily="34" charset="0"/>
+                <a:ea typeface="Calibri" pitchFamily="34" charset="-122"/>
+                <a:cs typeface="Calibri" pitchFamily="34" charset="-120"/>
+              </a:rPr>
+              <a:t>and private industry operating experience</a:t>
+            </a:r>
+            <a:endParaRPr lang="en-US" sz="900" dirty="0"/>
           </a:p>
         </p:txBody>
       </p:sp>
       <p:pic>
         <p:nvPicPr>
-          <p:cNvPr id="23" name="Image 3" descr="/sessions/blissful-awesome-feynman/build/icons/users.png"/>
+          <p:cNvPr id="326" name="Intuit Elite Badge"/>
           <p:cNvPicPr>
             <a:picLocks noChangeAspect="1"/>
           </p:cNvPicPr>
@@ -3190,8 +2863,8 @@
         </p:blipFill>
         <p:spPr>
           <a:xfrm>
-            <a:off x="6641592" y="5102352"/>
-            <a:ext cx="219456" cy="219456"/>
+            <a:off x="9806940" y="4572000"/>
+            <a:ext cx="1188720" cy="1188720"/>
           </a:xfrm>
           <a:prstGeom prst="rect">
             <a:avLst/>
@@ -3200,14 +2873,14 @@
       </p:pic>
       <p:sp>
         <p:nvSpPr>
-          <p:cNvPr id="207" name="Team Footer"/>
-          <p:cNvSpPr/>
-          <p:nvPr/>
-        </p:nvSpPr>
-        <p:spPr>
-          <a:xfrm>
-            <a:off x="548640" y="5852160"/>
-            <a:ext cx="11064240" cy="365760"/>
+          <p:cNvPr id="327" name="Badge Caption"/>
+          <p:cNvSpPr/>
+          <p:nvPr/>
+        </p:nvSpPr>
+        <p:spPr>
+          <a:xfrm>
+            <a:off x="9189720" y="5788660"/>
+            <a:ext cx="2423160" cy="228600"/>
           </a:xfrm>
           <a:prstGeom prst="rect">
             <a:avLst/>
@@ -3219,16 +2892,52 @@
           <a:bodyPr wrap="square" lIns="0" tIns="0" rIns="0" bIns="0" rtlCol="0" anchor="t"/>
           <a:lstStyle/>
           <a:p>
+            <a:pPr marL="0" indent="0" algn="ctr">
+              <a:buNone/>
+            </a:pPr>
+            <a:r>
+              <a:rPr lang="en-US" sz="800" kern="0" dirty="0">
+                <a:solidFill>
+                  <a:srgbClr val="9E9E9E"/>
+                </a:solidFill>
+                <a:latin typeface="Calibri" pitchFamily="34" charset="0"/>
+                <a:ea typeface="Calibri" pitchFamily="34" charset="-122"/>
+                <a:cs typeface="Calibri" pitchFamily="34" charset="-120"/>
+              </a:rPr>
+              <a:t>Highest QuickBooks partnership tier</a:t>
+            </a:r>
+            <a:endParaRPr lang="en-US" sz="800" dirty="0"/>
+          </a:p>
+        </p:txBody>
+      </p:sp>
+      <p:sp>
+        <p:nvSpPr>
+          <p:cNvPr id="328" name="Closing"/>
+          <p:cNvSpPr/>
+          <p:nvPr/>
+        </p:nvSpPr>
+        <p:spPr>
+          <a:xfrm>
+            <a:off x="548640" y="5943600"/>
+            <a:ext cx="8534400" cy="365760"/>
+          </a:xfrm>
+          <a:prstGeom prst="rect">
+            <a:avLst/>
+          </a:prstGeom>
+          <a:noFill/>
+          <a:ln/>
+        </p:spPr>
+        <p:txBody>
+          <a:bodyPr wrap="square" lIns="0" tIns="0" rIns="0" bIns="0" rtlCol="0" anchor="ctr"/>
+          <a:lstStyle/>
+          <a:p>
             <a:pPr marL="0" indent="0" algn="l">
-              <a:lnSpc>
-                <a:spcPct val="112000"/>
-              </a:lnSpc>
-              <a:buNone/>
-            </a:pPr>
-            <a:r>
-              <a:rPr lang="en-US" sz="1150" i="1" dirty="0">
-                <a:solidFill>
-                  <a:srgbClr val="B08D57"/>
+              <a:buNone/>
+            </a:pPr>
+            <a:r>
+              <a:rPr lang="en-US" sz="1100" i="1" kern="0" dirty="0">
+                <a:solidFill>
+                  <a:srgbClr val="8F7346"/>
                 </a:solidFill>
                 <a:latin typeface="Calibri" pitchFamily="34" charset="0"/>
                 <a:ea typeface="Calibri" pitchFamily="34" charset="-122"/>
@@ -3236,13 +2945,13 @@
               </a:rPr>
               <a:t>Partner-level work, delivered by the people you actually talk to.</a:t>
             </a:r>
-            <a:endParaRPr lang="en-US" dirty="0"/>
-          </a:p>
-        </p:txBody>
-      </p:sp>
-      <p:sp>
-        <p:nvSpPr>
-          <p:cNvPr id="31" name="Text 24"/>
+            <a:endParaRPr lang="en-US" sz="1100" dirty="0"/>
+          </a:p>
+        </p:txBody>
+      </p:sp>
+      <p:sp>
+        <p:nvSpPr>
+          <p:cNvPr id="329" name="Page Num"/>
           <p:cNvSpPr/>
           <p:nvPr/>
         </p:nvSpPr>
@@ -3265,7 +2974,7 @@
               <a:buNone/>
             </a:pPr>
             <a:r>
-              <a:rPr lang="en-US" sz="1000" dirty="0">
+              <a:rPr lang="en-US" sz="1000" kern="0" dirty="0">
                 <a:solidFill>
                   <a:srgbClr val="A0A0A0"/>
                 </a:solidFill>

--- a/Onyx_TrustBank_Presentation_8.pptx
+++ b/Onyx_TrustBank_Presentation_8.pptx
@@ -1980,7 +1980,7 @@
         <p:spPr>
           <a:xfrm>
             <a:off x="548640" y="1691640"/>
-            <a:ext cx="11064240" cy="2350008"/>
+            <a:ext cx="11064240" cy="2487168"/>
           </a:xfrm>
           <a:prstGeom prst="roundRect">
             <a:avLst>
@@ -2400,7 +2400,7 @@
                 <a:ea typeface="Calibri" pitchFamily="34" charset="-122"/>
                 <a:cs typeface="Calibri" pitchFamily="34" charset="-120"/>
               </a:rPr>
-              <a:t>UNITED STATES · SCOTTSDALE</a:t>
+              <a:t>SCOTTSDALE · CONTROLLER &amp; CFO</a:t>
             </a:r>
             <a:endParaRPr lang="en-US" sz="1100" dirty="0"/>
           </a:p>
@@ -2415,7 +2415,7 @@
         <p:spPr>
           <a:xfrm>
             <a:off x="841248" y="3337560"/>
-            <a:ext cx="5010912" cy="411480"/>
+            <a:ext cx="5010912" cy="548640"/>
           </a:xfrm>
           <a:prstGeom prst="rect">
             <a:avLst/>
@@ -2442,7 +2442,7 @@
                 <a:ea typeface="Calibri" pitchFamily="34" charset="-122"/>
                 <a:cs typeface="Calibri" pitchFamily="34" charset="-120"/>
               </a:rPr>
-              <a:t>Leadership, controller and CFO work, and the client relationship.</a:t>
+              <a:t>Month-end close, reporting, budgets, forecasts and financing support.</a:t>
             </a:r>
             <a:endParaRPr lang="en-US" sz="1000" dirty="0"/>
           </a:p>
@@ -2462,7 +2462,7 @@
                 <a:ea typeface="Calibri" pitchFamily="34" charset="-122"/>
                 <a:cs typeface="Calibri" pitchFamily="34" charset="-120"/>
               </a:rPr>
-              <a:t>Every accountant on the team: 10+ years minimum.</a:t>
+              <a:t>Leadership and the client relationship sit here.</a:t>
             </a:r>
             <a:endParaRPr lang="en-US" sz="1000" dirty="0"/>
           </a:p>
@@ -2501,7 +2501,7 @@
                 <a:ea typeface="Calibri" pitchFamily="34" charset="-122"/>
                 <a:cs typeface="Calibri" pitchFamily="34" charset="-120"/>
               </a:rPr>
-              <a:t>EUROPE</a:t>
+              <a:t>EUROPE · STAFF ACCOUNTING</a:t>
             </a:r>
             <a:endParaRPr lang="en-US" sz="1100" dirty="0"/>
           </a:p>
@@ -2516,7 +2516,7 @@
         <p:spPr>
           <a:xfrm>
             <a:off x="6309360" y="3337560"/>
-            <a:ext cx="5010912" cy="411480"/>
+            <a:ext cx="5010912" cy="548640"/>
           </a:xfrm>
           <a:prstGeom prst="rect">
             <a:avLst/>
@@ -2543,7 +2543,7 @@
                 <a:ea typeface="Calibri" pitchFamily="34" charset="-122"/>
                 <a:cs typeface="Calibri" pitchFamily="34" charset="-120"/>
               </a:rPr>
-              <a:t>Staff accounting: transaction detail, reconciliations and close support.</a:t>
+              <a:t>Transaction detail, reconciliations and the close support behind every engagement.</a:t>
             </a:r>
             <a:endParaRPr lang="en-US" sz="1000" dirty="0"/>
           </a:p>
@@ -2563,7 +2563,7 @@
                 <a:ea typeface="Calibri" pitchFamily="34" charset="-122"/>
                 <a:cs typeface="Calibri" pitchFamily="34" charset="-120"/>
               </a:rPr>
-              <a:t>Plus firm-wide support and global IT.</a:t>
+              <a:t>A distributed team across several European cities, on our systems and our review process.</a:t>
             </a:r>
             <a:endParaRPr lang="en-US" sz="1000" dirty="0"/>
           </a:p>
@@ -2577,7 +2577,7 @@
         </p:nvCxnSpPr>
         <p:spPr>
           <a:xfrm>
-            <a:off x="548640" y="4297680"/>
+            <a:off x="548640" y="4434840"/>
             <a:ext cx="11064240" cy="0"/>
           </a:xfrm>
           <a:prstGeom prst="line">
@@ -2612,7 +2612,7 @@
         </p:nvSpPr>
         <p:spPr>
           <a:xfrm>
-            <a:off x="548640" y="4617720"/>
+            <a:off x="548640" y="4663440"/>
             <a:ext cx="2606040" cy="320040"/>
           </a:xfrm>
           <a:prstGeom prst="rect">
@@ -2629,7 +2629,7 @@
               <a:buNone/>
             </a:pPr>
             <a:r>
-              <a:rPr lang="en-US" sz="1700" b="1" kern="0" dirty="0">
+              <a:rPr lang="en-US" sz="1500" b="1" kern="0" dirty="0">
                 <a:solidFill>
                   <a:srgbClr val="B08D57"/>
                 </a:solidFill>
@@ -2637,9 +2637,9 @@
                 <a:ea typeface="Cambria" pitchFamily="34" charset="-122"/>
                 <a:cs typeface="Cambria" pitchFamily="34" charset="-120"/>
               </a:rPr>
-              <a:t>TOP 10</a:t>
-            </a:r>
-            <a:endParaRPr lang="en-US" sz="1700" dirty="0"/>
+              <a:t>BIG-FIRM TRAINED</a:t>
+            </a:r>
+            <a:endParaRPr lang="en-US" sz="1500" dirty="0"/>
           </a:p>
         </p:txBody>
       </p:sp>
@@ -2652,7 +2652,7 @@
         <p:spPr>
           <a:xfrm>
             <a:off x="548640" y="4983480"/>
-            <a:ext cx="2606040" cy="548640"/>
+            <a:ext cx="2606040" cy="731520"/>
           </a:xfrm>
           <a:prstGeom prst="rect">
             <a:avLst/>
@@ -2666,7 +2666,7 @@
           <a:p>
             <a:pPr marL="0" indent="0" algn="l">
               <a:lnSpc>
-                <a:spcPct val="112000"/>
+                <a:spcPct val="115000"/>
               </a:lnSpc>
               <a:buNone/>
             </a:pPr>
@@ -2679,7 +2679,7 @@
                 <a:ea typeface="Calibri" pitchFamily="34" charset="-122"/>
                 <a:cs typeface="Calibri" pitchFamily="34" charset="-120"/>
               </a:rPr>
-              <a:t>former Directors &amp; Managers of Top 10 accounting firms</a:t>
+              <a:t>Directors and Managers from top 10 national accounting firms — the tier above regional practices. You get that review discipline: schedules that tie and support assembled up front.</a:t>
             </a:r>
             <a:endParaRPr lang="en-US" sz="900" dirty="0"/>
           </a:p>
@@ -2693,7 +2693,7 @@
         </p:nvSpPr>
         <p:spPr>
           <a:xfrm>
-            <a:off x="3383280" y="4617720"/>
+            <a:off x="3383280" y="4663440"/>
             <a:ext cx="2606040" cy="320040"/>
           </a:xfrm>
           <a:prstGeom prst="rect">
@@ -2710,7 +2710,7 @@
               <a:buNone/>
             </a:pPr>
             <a:r>
-              <a:rPr lang="en-US" sz="1700" b="1" kern="0" dirty="0">
+              <a:rPr lang="en-US" sz="1500" b="1" kern="0" dirty="0">
                 <a:solidFill>
                   <a:srgbClr val="B08D57"/>
                 </a:solidFill>
@@ -2720,7 +2720,7 @@
               </a:rPr>
               <a:t>MULTI-INDUSTRY</a:t>
             </a:r>
-            <a:endParaRPr lang="en-US" sz="1700" dirty="0"/>
+            <a:endParaRPr lang="en-US" sz="1500" dirty="0"/>
           </a:p>
         </p:txBody>
       </p:sp>
@@ -2733,7 +2733,7 @@
         <p:spPr>
           <a:xfrm>
             <a:off x="3383280" y="4983480"/>
-            <a:ext cx="2606040" cy="548640"/>
+            <a:ext cx="2606040" cy="731520"/>
           </a:xfrm>
           <a:prstGeom prst="rect">
             <a:avLst/>
@@ -2747,7 +2747,7 @@
           <a:p>
             <a:pPr marL="0" indent="0" algn="l">
               <a:lnSpc>
-                <a:spcPct val="112000"/>
+                <a:spcPct val="115000"/>
               </a:lnSpc>
               <a:buNone/>
             </a:pPr>
@@ -2760,7 +2760,7 @@
                 <a:ea typeface="Calibri" pitchFamily="34" charset="-122"/>
                 <a:cs typeface="Calibri" pitchFamily="34" charset="-120"/>
               </a:rPr>
-              <a:t>construction · real estate · property management · professional services · distribution</a:t>
+              <a:t>Construction · real estate · property management · professional services · distribution. We already know the schedules your credit team asks for in each one.</a:t>
             </a:r>
             <a:endParaRPr lang="en-US" sz="900" dirty="0"/>
           </a:p>
@@ -2774,7 +2774,7 @@
         </p:nvSpPr>
         <p:spPr>
           <a:xfrm>
-            <a:off x="6217920" y="4617720"/>
+            <a:off x="6217920" y="4663440"/>
             <a:ext cx="2606040" cy="320040"/>
           </a:xfrm>
           <a:prstGeom prst="rect">
@@ -2791,7 +2791,7 @@
               <a:buNone/>
             </a:pPr>
             <a:r>
-              <a:rPr lang="en-US" sz="1700" b="1" kern="0" dirty="0">
+              <a:rPr lang="en-US" sz="1500" b="1" kern="0" dirty="0">
                 <a:solidFill>
                   <a:srgbClr val="B08D57"/>
                 </a:solidFill>
@@ -2801,7 +2801,7 @@
               </a:rPr>
               <a:t>PRIVATE EQUITY</a:t>
             </a:r>
-            <a:endParaRPr lang="en-US" sz="1700" dirty="0"/>
+            <a:endParaRPr lang="en-US" sz="1500" dirty="0"/>
           </a:p>
         </p:txBody>
       </p:sp>
@@ -2814,7 +2814,7 @@
         <p:spPr>
           <a:xfrm>
             <a:off x="6217920" y="4983480"/>
-            <a:ext cx="2606040" cy="548640"/>
+            <a:ext cx="2606040" cy="731520"/>
           </a:xfrm>
           <a:prstGeom prst="rect">
             <a:avLst/>
@@ -2828,7 +2828,7 @@
           <a:p>
             <a:pPr marL="0" indent="0" algn="l">
               <a:lnSpc>
-                <a:spcPct val="112000"/>
+                <a:spcPct val="115000"/>
               </a:lnSpc>
               <a:buNone/>
             </a:pPr>
@@ -2841,7 +2841,7 @@
                 <a:ea typeface="Calibri" pitchFamily="34" charset="-122"/>
                 <a:cs typeface="Calibri" pitchFamily="34" charset="-120"/>
               </a:rPr>
-              <a:t>and private industry operating experience</a:t>
+              <a:t>PE-backed and private-industry operating experience: reporting packages, covenant tracking, and the lender-facing detail underwriting runs on.</a:t>
             </a:r>
             <a:endParaRPr lang="en-US" sz="900" dirty="0"/>
           </a:p>
@@ -2863,7 +2863,7 @@
         </p:blipFill>
         <p:spPr>
           <a:xfrm>
-            <a:off x="9806940" y="4572000"/>
+            <a:off x="9806940" y="4663440"/>
             <a:ext cx="1188720" cy="1188720"/>
           </a:xfrm>
           <a:prstGeom prst="rect">
@@ -2879,7 +2879,7 @@
         </p:nvSpPr>
         <p:spPr>
           <a:xfrm>
-            <a:off x="9189720" y="5788660"/>
+            <a:off x="9189720" y="5880100"/>
             <a:ext cx="2423160" cy="228600"/>
           </a:xfrm>
           <a:prstGeom prst="rect">
@@ -2918,8 +2918,8 @@
         </p:nvSpPr>
         <p:spPr>
           <a:xfrm>
-            <a:off x="548640" y="5943600"/>
-            <a:ext cx="8534400" cy="365760"/>
+            <a:off x="548640" y="6035040"/>
+            <a:ext cx="8534400" cy="320040"/>
           </a:xfrm>
           <a:prstGeom prst="rect">
             <a:avLst/>
@@ -2943,7 +2943,7 @@
                 <a:ea typeface="Calibri" pitchFamily="34" charset="-122"/>
                 <a:cs typeface="Calibri" pitchFamily="34" charset="-120"/>
               </a:rPr>
-              <a:t>Partner-level work, delivered by the people you actually talk to.</a:t>
+              <a:t>Every accountant on the team carries 10+ years. Partner-level work, delivered by the people you actually talk to.</a:t>
             </a:r>
             <a:endParaRPr lang="en-US" sz="1100" dirty="0"/>
           </a:p>
